--- a/template.pptx
+++ b/template.pptx
@@ -111,9 +111,6 @@
     <p:ext uri="{EFAFB233-063F-42B5-8137-9DF3F51BA10A}">
       <p15:sldGuideLst xmlns:p15="http://schemas.microsoft.com/office/powerpoint/2012/main"/>
     </p:ext>
-    <p:ext uri="{2D200454-40CA-4A62-9FC3-DE9A4176ACB9}">
-      <p15:notesGuideLst xmlns:p15="http://schemas.microsoft.com/office/powerpoint/2012/main"/>
-    </p:ext>
   </p:extLst>
 </p:presentation>
 </file>
@@ -212,7 +209,7 @@
           <a:p>
             <a:fld id="{2853ECE8-31BF-4915-8E5C-07975FCFAF5E}" type="datetimeFigureOut">
               <a:rPr lang="zh-CN" altLang="en-US" smtClean="0"/>
-              <a:t>2026/4/15</a:t>
+              <a:t>2026/3/13</a:t>
             </a:fld>
             <a:endParaRPr lang="zh-CN" altLang="en-US"/>
           </a:p>
@@ -347,7 +344,7 @@
           <a:p>
             <a:fld id="{55E6DF0F-4F30-4166-A93F-A7E767D9F449}" type="datetimeFigureOut">
               <a:rPr lang="zh-CN" altLang="en-US" smtClean="0"/>
-              <a:t>2026/4/15</a:t>
+              <a:t>2026/3/13</a:t>
             </a:fld>
             <a:endParaRPr lang="zh-CN" altLang="en-US"/>
           </a:p>
@@ -403,6 +400,110 @@
               <a:rPr lang="zh-CN" altLang="en-US" smtClean="0"/>
               <a:t>‹#›</a:t>
             </a:fld>
+            <a:endParaRPr lang="zh-CN" altLang="en-US"/>
+          </a:p>
+        </p:txBody>
+      </p:sp>
+      <p:sp>
+        <p:nvSpPr>
+          <p:cNvPr id="2" name="矩形 1">
+            <a:extLst>
+              <a:ext uri="{FF2B5EF4-FFF2-40B4-BE49-F238E27FC236}">
+                <a16:creationId xmlns:a16="http://schemas.microsoft.com/office/drawing/2014/main" id="{C1EDDD36-5C8A-7B0E-5555-876B258552A4}"/>
+              </a:ext>
+            </a:extLst>
+          </p:cNvPr>
+          <p:cNvSpPr/>
+          <p:nvPr userDrawn="1"/>
+        </p:nvSpPr>
+        <p:spPr>
+          <a:xfrm>
+            <a:off x="0" y="0"/>
+            <a:ext cx="12192000" cy="249382"/>
+          </a:xfrm>
+          <a:prstGeom prst="rect">
+            <a:avLst/>
+          </a:prstGeom>
+          <a:solidFill>
+            <a:schemeClr val="accent5"/>
+          </a:solidFill>
+          <a:ln>
+            <a:noFill/>
+          </a:ln>
+        </p:spPr>
+        <p:style>
+          <a:lnRef idx="2">
+            <a:schemeClr val="accent1">
+              <a:shade val="15000"/>
+            </a:schemeClr>
+          </a:lnRef>
+          <a:fillRef idx="1">
+            <a:schemeClr val="accent1"/>
+          </a:fillRef>
+          <a:effectRef idx="0">
+            <a:schemeClr val="accent1"/>
+          </a:effectRef>
+          <a:fontRef idx="minor">
+            <a:schemeClr val="lt1"/>
+          </a:fontRef>
+        </p:style>
+        <p:txBody>
+          <a:bodyPr rtlCol="0" anchor="ctr"/>
+          <a:lstStyle/>
+          <a:p>
+            <a:pPr algn="ctr"/>
+            <a:endParaRPr lang="zh-CN" altLang="en-US"/>
+          </a:p>
+        </p:txBody>
+      </p:sp>
+      <p:sp>
+        <p:nvSpPr>
+          <p:cNvPr id="3" name="矩形 2">
+            <a:extLst>
+              <a:ext uri="{FF2B5EF4-FFF2-40B4-BE49-F238E27FC236}">
+                <a16:creationId xmlns:a16="http://schemas.microsoft.com/office/drawing/2014/main" id="{91B52C9B-694A-6C0B-65B3-D62DC451F7B8}"/>
+              </a:ext>
+            </a:extLst>
+          </p:cNvPr>
+          <p:cNvSpPr/>
+          <p:nvPr userDrawn="1"/>
+        </p:nvSpPr>
+        <p:spPr>
+          <a:xfrm>
+            <a:off x="0" y="6608618"/>
+            <a:ext cx="12192000" cy="249382"/>
+          </a:xfrm>
+          <a:prstGeom prst="rect">
+            <a:avLst/>
+          </a:prstGeom>
+          <a:solidFill>
+            <a:schemeClr val="accent5"/>
+          </a:solidFill>
+          <a:ln>
+            <a:noFill/>
+          </a:ln>
+        </p:spPr>
+        <p:style>
+          <a:lnRef idx="2">
+            <a:schemeClr val="accent1">
+              <a:shade val="15000"/>
+            </a:schemeClr>
+          </a:lnRef>
+          <a:fillRef idx="1">
+            <a:schemeClr val="accent1"/>
+          </a:fillRef>
+          <a:effectRef idx="0">
+            <a:schemeClr val="accent1"/>
+          </a:effectRef>
+          <a:fontRef idx="minor">
+            <a:schemeClr val="lt1"/>
+          </a:fontRef>
+        </p:style>
+        <p:txBody>
+          <a:bodyPr rtlCol="0" anchor="ctr"/>
+          <a:lstStyle/>
+          <a:p>
+            <a:pPr algn="ctr"/>
             <a:endParaRPr lang="zh-CN" altLang="en-US"/>
           </a:p>
         </p:txBody>
@@ -561,7 +662,7 @@
           <a:p>
             <a:fld id="{55E6DF0F-4F30-4166-A93F-A7E767D9F449}" type="datetimeFigureOut">
               <a:rPr lang="zh-CN" altLang="en-US" smtClean="0"/>
-              <a:t>2026/4/15</a:t>
+              <a:t>2026/3/13</a:t>
             </a:fld>
             <a:endParaRPr lang="zh-CN" altLang="en-US"/>
           </a:p>
@@ -775,7 +876,7 @@
           <a:p>
             <a:fld id="{55E6DF0F-4F30-4166-A93F-A7E767D9F449}" type="datetimeFigureOut">
               <a:rPr lang="zh-CN" altLang="en-US" smtClean="0"/>
-              <a:t>2026/4/15</a:t>
+              <a:t>2026/3/13</a:t>
             </a:fld>
             <a:endParaRPr lang="zh-CN" altLang="en-US"/>
           </a:p>
@@ -989,7 +1090,7 @@
           <a:p>
             <a:fld id="{55E6DF0F-4F30-4166-A93F-A7E767D9F449}" type="datetimeFigureOut">
               <a:rPr lang="zh-CN" altLang="en-US" smtClean="0"/>
-              <a:t>2026/4/15</a:t>
+              <a:t>2026/3/13</a:t>
             </a:fld>
             <a:endParaRPr lang="zh-CN" altLang="en-US"/>
           </a:p>
@@ -1270,7 +1371,7 @@
           <a:p>
             <a:fld id="{55E6DF0F-4F30-4166-A93F-A7E767D9F449}" type="datetimeFigureOut">
               <a:rPr lang="zh-CN" altLang="en-US" smtClean="0"/>
-              <a:t>2026/4/15</a:t>
+              <a:t>2026/3/13</a:t>
             </a:fld>
             <a:endParaRPr lang="zh-CN" altLang="en-US"/>
           </a:p>
@@ -1549,7 +1650,7 @@
           <a:p>
             <a:fld id="{55E6DF0F-4F30-4166-A93F-A7E767D9F449}" type="datetimeFigureOut">
               <a:rPr lang="zh-CN" altLang="en-US" smtClean="0"/>
-              <a:t>2026/4/15</a:t>
+              <a:t>2026/3/13</a:t>
             </a:fld>
             <a:endParaRPr lang="zh-CN" altLang="en-US"/>
           </a:p>
@@ -1976,7 +2077,7 @@
           <a:p>
             <a:fld id="{55E6DF0F-4F30-4166-A93F-A7E767D9F449}" type="datetimeFigureOut">
               <a:rPr lang="zh-CN" altLang="en-US" smtClean="0"/>
-              <a:t>2026/4/15</a:t>
+              <a:t>2026/3/13</a:t>
             </a:fld>
             <a:endParaRPr lang="zh-CN" altLang="en-US"/>
           </a:p>
@@ -2125,7 +2226,7 @@
           <a:p>
             <a:fld id="{55E6DF0F-4F30-4166-A93F-A7E767D9F449}" type="datetimeFigureOut">
               <a:rPr lang="zh-CN" altLang="en-US" smtClean="0"/>
-              <a:t>2026/4/15</a:t>
+              <a:t>2026/3/13</a:t>
             </a:fld>
             <a:endParaRPr lang="zh-CN" altLang="en-US"/>
           </a:p>
@@ -2238,7 +2339,7 @@
           <a:p>
             <a:fld id="{55E6DF0F-4F30-4166-A93F-A7E767D9F449}" type="datetimeFigureOut">
               <a:rPr lang="zh-CN" altLang="en-US" smtClean="0"/>
-              <a:t>2026/4/15</a:t>
+              <a:t>2026/3/13</a:t>
             </a:fld>
             <a:endParaRPr lang="zh-CN" altLang="en-US"/>
           </a:p>
@@ -2558,7 +2659,7 @@
           <a:p>
             <a:fld id="{55E6DF0F-4F30-4166-A93F-A7E767D9F449}" type="datetimeFigureOut">
               <a:rPr lang="zh-CN" altLang="en-US" smtClean="0"/>
-              <a:t>2026/4/15</a:t>
+              <a:t>2026/3/13</a:t>
             </a:fld>
             <a:endParaRPr lang="zh-CN" altLang="en-US"/>
           </a:p>
@@ -2855,7 +2956,7 @@
           <a:p>
             <a:fld id="{55E6DF0F-4F30-4166-A93F-A7E767D9F449}" type="datetimeFigureOut">
               <a:rPr lang="zh-CN" altLang="en-US" smtClean="0"/>
-              <a:t>2026/4/15</a:t>
+              <a:t>2026/3/13</a:t>
             </a:fld>
             <a:endParaRPr lang="zh-CN" altLang="en-US"/>
           </a:p>
@@ -2991,7 +3092,7 @@
           <a:p>
             <a:fld id="{55E6DF0F-4F30-4166-A93F-A7E767D9F449}" type="datetimeFigureOut">
               <a:rPr lang="zh-CN" altLang="en-US" smtClean="0"/>
-              <a:t>2026/4/15</a:t>
+              <a:t>2026/3/13</a:t>
             </a:fld>
             <a:endParaRPr lang="zh-CN" altLang="en-US"/>
           </a:p>
